--- a/P02-NEGRO-IAIA-2026.pptx
+++ b/P02-NEGRO-IAIA-2026.pptx
@@ -6489,7 +6489,7 @@
                 <a:latin typeface="Times New Roman" panose="02020603050405020304" pitchFamily="18" charset="0"/>
                 <a:cs typeface="Times New Roman" panose="02020603050405020304" pitchFamily="18" charset="0"/>
               </a:rPr>
-              <a:t>1025 registros y 13 columnas</a:t>
+              <a:t>1025 registros y 14 columnas</a:t>
             </a:r>
             <a:r>
               <a:rPr lang="es-ES" sz="2000" dirty="0">
